--- a/media/exports/reports/2026-08/volunteers.pptx
+++ b/media/exports/reports/2026-08/volunteers.pptx
@@ -197,22 +197,22 @@
               <c:strCache>
                 <c:ptCount val="6"/>
                 <c:pt idx="0">
-                  <c:v>Mental health first aid</c:v>
+                  <c:v>Volunteer coordinator</c:v>
                 </c:pt>
                 <c:pt idx="1">
+                  <c:v>Digital literacy</c:v>
+                </c:pt>
+                <c:pt idx="2">
                   <c:v>Youth outreach</c:v>
                 </c:pt>
-                <c:pt idx="2">
+                <c:pt idx="3">
                   <c:v>Housing support</c:v>
                 </c:pt>
-                <c:pt idx="3">
-                  <c:v>Volunteer coordinator</c:v>
-                </c:pt>
                 <c:pt idx="4">
-                  <c:v>Digital literacy</c:v>
+                  <c:v>Community meals</c:v>
                 </c:pt>
                 <c:pt idx="5">
-                  <c:v>Community meals</c:v>
+                  <c:v>Mental health first aid</c:v>
                 </c:pt>
               </c:strCache>
             </c:strRef>
@@ -224,22 +224,22 @@
                 <c:formatCode>#,##0;[Red](#,##0)</c:formatCode>
                 <c:ptCount val="6"/>
                 <c:pt idx="0">
-                  <c:v>89.5</c:v>
+                  <c:v>83.0</c:v>
                 </c:pt>
                 <c:pt idx="1">
-                  <c:v>140.5</c:v>
+                  <c:v>105.5</c:v>
                 </c:pt>
                 <c:pt idx="2">
-                  <c:v>142.5</c:v>
+                  <c:v>148.5</c:v>
                 </c:pt>
                 <c:pt idx="3">
-                  <c:v>166.5</c:v>
+                  <c:v>159.0</c:v>
                 </c:pt>
                 <c:pt idx="4">
-                  <c:v>170.0</c:v>
+                  <c:v>178.0</c:v>
                 </c:pt>
                 <c:pt idx="5">
-                  <c:v>176.5</c:v>
+                  <c:v>193.5</c:v>
                 </c:pt>
               </c:numCache>
             </c:numRef>
@@ -303,7 +303,7 @@
       <c:valAx>
         <c:axId val="-2113994440"/>
         <c:scaling>
-          <c:max val="202.975"/>
+          <c:max val="222.52499999999998"/>
           <c:min val="0.0"/>
         </c:scaling>
         <c:delete/>
@@ -466,73 +466,73 @@
                 <c:formatCode>#,##0;[Red](#,##0)</c:formatCode>
                 <c:ptCount val="23"/>
                 <c:pt idx="0">
-                  <c:v>317.5</c:v>
+                  <c:v>381.0</c:v>
                 </c:pt>
                 <c:pt idx="1">
-                  <c:v>392.0</c:v>
+                  <c:v>373.5</c:v>
                 </c:pt>
                 <c:pt idx="2">
-                  <c:v>363.5</c:v>
+                  <c:v>383.5</c:v>
                 </c:pt>
                 <c:pt idx="3">
-                  <c:v>399.0</c:v>
+                  <c:v>387.5</c:v>
                 </c:pt>
                 <c:pt idx="4">
-                  <c:v>422.0</c:v>
+                  <c:v>376.5</c:v>
                 </c:pt>
                 <c:pt idx="5">
-                  <c:v>451.5</c:v>
+                  <c:v>444.0</c:v>
                 </c:pt>
                 <c:pt idx="6">
-                  <c:v>445.0</c:v>
+                  <c:v>422.5</c:v>
                 </c:pt>
                 <c:pt idx="7">
-                  <c:v>513.0</c:v>
+                  <c:v>562.0</c:v>
                 </c:pt>
                 <c:pt idx="8">
-                  <c:v>529.0</c:v>
+                  <c:v>568.0</c:v>
                 </c:pt>
                 <c:pt idx="9">
-                  <c:v>586.0</c:v>
+                  <c:v>609.5</c:v>
                 </c:pt>
                 <c:pt idx="10">
-                  <c:v>560.5</c:v>
+                  <c:v>627.0</c:v>
                 </c:pt>
                 <c:pt idx="11">
-                  <c:v>625.5</c:v>
+                  <c:v>708.5</c:v>
                 </c:pt>
                 <c:pt idx="12">
-                  <c:v>669.5</c:v>
+                  <c:v>817.0</c:v>
                 </c:pt>
                 <c:pt idx="13">
-                  <c:v>626.5</c:v>
+                  <c:v>780.5</c:v>
                 </c:pt>
                 <c:pt idx="14">
-                  <c:v>683.0</c:v>
+                  <c:v>830.5</c:v>
                 </c:pt>
                 <c:pt idx="15">
-                  <c:v>711.5</c:v>
+                  <c:v>817.5</c:v>
                 </c:pt>
                 <c:pt idx="16">
-                  <c:v>700.0</c:v>
+                  <c:v>781.0</c:v>
                 </c:pt>
                 <c:pt idx="17">
-                  <c:v>772.0</c:v>
+                  <c:v>870.0</c:v>
                 </c:pt>
                 <c:pt idx="18">
-                  <c:v>794.5</c:v>
+                  <c:v>816.0</c:v>
                 </c:pt>
                 <c:pt idx="19">
-                  <c:v>811.0</c:v>
+                  <c:v>830.5</c:v>
                 </c:pt>
                 <c:pt idx="20">
-                  <c:v>819.0</c:v>
+                  <c:v>878.5</c:v>
                 </c:pt>
                 <c:pt idx="21">
-                  <c:v>918.0</c:v>
+                  <c:v>938.0</c:v>
                 </c:pt>
                 <c:pt idx="22">
-                  <c:v>885.5</c:v>
+                  <c:v>867.5</c:v>
                 </c:pt>
               </c:numCache>
             </c:numRef>
@@ -1106,7 +1106,7 @@
           <a:lstStyle/>
           <a:p>
             <a:r>
-              <a:t>How many volunteer hours go into each program?. Volunteer hours, August: 885.5 h; Volunteers who did a shift, August: 59; Hours per volunteer, August: 15.0 h; August last year: 560.5 h. 59 volunteers gave 885.5 h in August, against 918.0 h in July. Community meals drew the most (176.5 h, 19.9%). Mental health first aid had the fewest volunteer hours (89.5 h). Hours are up 58.0% on August last year.</a:t>
+              <a:t>How many volunteer hours go into each program?. Volunteer hours, August: 867.5 h; Volunteers who did a shift, August: 60; Hours per volunteer, August: 14.5 h; August last year: 627.0 h. 60 volunteers gave 867.5 h in August, against 938.0 h in July. Mental health first aid drew the most (193.5 h, 22.3%). Volunteer coordinator had the fewest volunteer hours (83.0 h). Hours are up 38.4% on August last year.</a:t>
             </a:r>
           </a:p>
         </p:txBody>
@@ -4591,7 +4591,7 @@
                 </a:solidFill>
                 <a:latin typeface="Roboto"/>
               </a:rPr>
-              <a:t>Data retrieved 2pm, Tue 6 Oct 2026 · Generated 8 Oct 2026, 6:29pm · Sample data · Made with Python (python-pptx)</a:t>
+              <a:t>Data retrieved 2pm, Tue 6 Oct 2026 · Generated 8 Oct 2026, 11:41pm · Sample data · Made with Python (python-pptx)</a:t>
             </a:r>
           </a:p>
         </p:txBody>
@@ -4937,7 +4937,7 @@
                 </a:solidFill>
                 <a:latin typeface="Roboto"/>
               </a:rPr>
-              <a:t>885.5 h</a:t>
+              <a:t>867.5 h</a:t>
             </a:r>
           </a:p>
         </p:txBody>
@@ -4976,7 +4976,7 @@
                 </a:solidFill>
                 <a:latin typeface="Roboto"/>
               </a:rPr>
-              <a:t>July 918.0 h</a:t>
+              <a:t>July 938.0 h</a:t>
             </a:r>
           </a:p>
         </p:txBody>
@@ -5103,7 +5103,7 @@
                 </a:solidFill>
                 <a:latin typeface="Roboto"/>
               </a:rPr>
-              <a:t>59</a:t>
+              <a:t>60</a:t>
             </a:r>
           </a:p>
         </p:txBody>
@@ -5269,7 +5269,7 @@
                 </a:solidFill>
                 <a:latin typeface="Roboto"/>
               </a:rPr>
-              <a:t>15.0 h</a:t>
+              <a:t>14.5 h</a:t>
             </a:r>
           </a:p>
         </p:txBody>
@@ -5435,7 +5435,7 @@
                 </a:solidFill>
                 <a:latin typeface="Roboto"/>
               </a:rPr>
-              <a:t>560.5 h</a:t>
+              <a:t>627.0 h</a:t>
             </a:r>
           </a:p>
         </p:txBody>
@@ -5474,7 +5474,7 @@
                 </a:solidFill>
                 <a:latin typeface="Roboto"/>
               </a:rPr>
-              <a:t>41 volunteers</a:t>
+              <a:t>42 volunteers</a:t>
             </a:r>
           </a:p>
         </p:txBody>
@@ -5619,7 +5619,7 @@
                 </a:solidFill>
                 <a:latin typeface="Roboto"/>
               </a:rPr>
-              <a:t>59 volunteers gave 885.5 h in August, against 918.0 h in July. Community meals drew the most (176.5 h, 19.9%).</a:t>
+              <a:t>60 volunteers gave 867.5 h in August, against 938.0 h in July. Mental health first aid drew the most (193.5 h, 22.3%).</a:t>
             </a:r>
           </a:p>
         </p:txBody>
@@ -5746,7 +5746,7 @@
                 </a:solidFill>
                 <a:latin typeface="Roboto"/>
               </a:rPr>
-              <a:t>Mental health first aid had the fewest volunteer hours (89.5 h). Hours are up 58.0% on August last year.</a:t>
+              <a:t>Volunteer coordinator had the fewest volunteer hours (83.0 h). Hours are up 38.4% on August last year.</a:t>
             </a:r>
           </a:p>
         </p:txBody>
@@ -5824,7 +5824,7 @@
                 </a:solidFill>
                 <a:latin typeface="Roboto"/>
               </a:rPr>
-              <a:t>Data retrieved 2pm, Tue 6 Oct 2026 · Generated 8 Oct 2026, 6:29pm · Sample data · Made with Python (python-pptx)</a:t>
+              <a:t>Data retrieved 2pm, Tue 6 Oct 2026 · Generated 8 Oct 2026, 11:41pm · Sample data · Made with Python (python-pptx)</a:t>
             </a:r>
           </a:p>
         </p:txBody>
@@ -6139,7 +6139,7 @@
                 </a:solidFill>
                 <a:latin typeface="Roboto"/>
               </a:rPr>
-              <a:t>Data retrieved 2pm, Tue 6 Oct 2026 · Generated 8 Oct 2026, 6:29pm · Sample data · Made with Python (python-pptx)</a:t>
+              <a:t>Data retrieved 2pm, Tue 6 Oct 2026 · Generated 8 Oct 2026, 11:41pm · Sample data · Made with Python (python-pptx)</a:t>
             </a:r>
           </a:p>
         </p:txBody>

--- a/media/exports/reports/2026-08/volunteers.pptx
+++ b/media/exports/reports/2026-08/volunteers.pptx
@@ -1036,7 +1036,7 @@
           <a:lstStyle/>
           <a:p>
             <a:r>
-              <a:t>How many volunteer hours go into each program?. Sample Community Services Ltd. Period: August 2026. Every volunteer shift: who (a code, not a name), which program, and how many hours.</a:t>
+              <a:t>How many volunteer hours go into each program?. Sample Community Services Ltd. Period: August 2026. In short: 867.5 h of volunteer time in August, from 60 volunteers; most went to Mental health first aid. Every volunteer shift: who (a code, not a name), which program, and how many hours.</a:t>
             </a:r>
           </a:p>
         </p:txBody>
@@ -4401,7 +4401,7 @@
         <p:spPr>
           <a:xfrm>
             <a:off x="457200" y="3703320"/>
-            <a:ext cx="11277295" cy="313690"/>
+            <a:ext cx="11277295" cy="535940"/>
           </a:xfrm>
           <a:prstGeom prst="rect">
             <a:avLst/>
@@ -4426,7 +4426,7 @@
                 </a:solidFill>
                 <a:latin typeface="Roboto"/>
               </a:rPr>
-              <a:t>Period: August 2026. Every volunteer shift: who (a code, not a name), which program, and how many hours.</a:t>
+              <a:t>Period: August 2026. In short: 867.5 h of volunteer time in August, from 60 volunteers; most went to Mental health first aid. Every volunteer shift: who (a code, not a name), which program, and how many hours.</a:t>
             </a:r>
           </a:p>
         </p:txBody>
@@ -4439,7 +4439,7 @@
         </p:nvSpPr>
         <p:spPr>
           <a:xfrm>
-            <a:off x="457200" y="4108450"/>
+            <a:off x="457200" y="4330700"/>
             <a:ext cx="11277295" cy="1097280"/>
           </a:xfrm>
           <a:prstGeom prst="rect">
@@ -4591,7 +4591,7 @@
                 </a:solidFill>
                 <a:latin typeface="Roboto"/>
               </a:rPr>
-              <a:t>Data retrieved 2pm, Tue 6 Oct 2026 · Generated 8 Oct 2026, 11:41pm · Sample data · Made with Python (python-pptx)</a:t>
+              <a:t>Data retrieved 2pm, Tue 6 Oct 2026 · Generated 10 Oct 2026, 9:55pm · Sample data · Made with Python (python-pptx)</a:t>
             </a:r>
           </a:p>
         </p:txBody>
@@ -5824,7 +5824,7 @@
                 </a:solidFill>
                 <a:latin typeface="Roboto"/>
               </a:rPr>
-              <a:t>Data retrieved 2pm, Tue 6 Oct 2026 · Generated 8 Oct 2026, 11:41pm · Sample data · Made with Python (python-pptx)</a:t>
+              <a:t>Data retrieved 2pm, Tue 6 Oct 2026 · Generated 10 Oct 2026, 9:55pm · Sample data · Made with Python (python-pptx)</a:t>
             </a:r>
           </a:p>
         </p:txBody>
@@ -6139,7 +6139,7 @@
                 </a:solidFill>
                 <a:latin typeface="Roboto"/>
               </a:rPr>
-              <a:t>Data retrieved 2pm, Tue 6 Oct 2026 · Generated 8 Oct 2026, 11:41pm · Sample data · Made with Python (python-pptx)</a:t>
+              <a:t>Data retrieved 2pm, Tue 6 Oct 2026 · Generated 10 Oct 2026, 9:55pm · Sample data · Made with Python (python-pptx)</a:t>
             </a:r>
           </a:p>
         </p:txBody>
